--- a/代码/figures/论文数据图/问题二/第二问_技术路线图/第二问_技术路线图.pptx
+++ b/代码/figures/论文数据图/问题二/第二问_技术路线图/第二问_技术路线图.pptx
@@ -2131,7 +2131,6 @@
               </a:rPr>
               <a:t>日前线性规划</a:t>
             </a:r>
-            <a:endParaRPr/>
           </a:p>
           <a:p>
             <a:pPr algn="ctr">
@@ -2147,9 +2146,8 @@
                 <a:latin typeface="Microsoft YaHei"/>
                 <a:ea typeface="Microsoft YaHei"/>
               </a:rPr>
-              <a:t>min Σ p_t g_t</a:t>
-            </a:r>
-            <a:endParaRPr/>
+              <a:t>最小化购电费用</a:t>
+            </a:r>
           </a:p>
           <a:p>
             <a:pPr algn="ctr">
@@ -2165,19 +2163,8 @@
                 <a:latin typeface="Microsoft YaHei"/>
                 <a:ea typeface="Microsoft YaHei"/>
               </a:rPr>
-              <a:t>储能</a:t>
-            </a:r>
-            <a:r>
-              <a:rPr lang="en-US" sz="1500">
-                <a:solidFill>
-                  <a:srgbClr val="111111"/>
-                </a:solidFill>
-                <a:latin typeface="Microsoft YaHei"/>
-                <a:ea typeface="Microsoft YaHei"/>
-              </a:rPr>
-              <a:t> 1200—10800</a:t>
-            </a:r>
-            <a:endParaRPr/>
+              <a:t>满足储电量边界</a:t>
+            </a:r>
           </a:p>
           <a:p>
             <a:pPr algn="ctr">
@@ -2193,19 +2180,8 @@
                 <a:latin typeface="Microsoft YaHei"/>
                 <a:ea typeface="Microsoft YaHei"/>
               </a:rPr>
-              <a:t>功率</a:t>
-            </a:r>
-            <a:r>
-              <a:rPr lang="en-US" sz="1500">
-                <a:solidFill>
-                  <a:srgbClr val="111111"/>
-                </a:solidFill>
-                <a:latin typeface="Microsoft YaHei"/>
-                <a:ea typeface="Microsoft YaHei"/>
-              </a:rPr>
-              <a:t> ≤5000 kW</a:t>
-            </a:r>
-            <a:endParaRPr/>
+              <a:t>限制充放电功率</a:t>
+            </a:r>
           </a:p>
         </p:txBody>
       </p:sp>
@@ -2269,17 +2245,6 @@
               </a:rPr>
               <a:t>全天购电计划</a:t>
             </a:r>
-            <a:r>
-              <a:rPr lang="en-US" sz="1650">
-                <a:solidFill>
-                  <a:srgbClr val="111111"/>
-                </a:solidFill>
-                <a:latin typeface="Microsoft YaHei"/>
-                <a:ea typeface="Microsoft YaHei"/>
-              </a:rPr>
-              <a:t> g_d</a:t>
-            </a:r>
-            <a:endParaRPr/>
           </a:p>
           <a:p>
             <a:pPr algn="ctr">
@@ -2297,7 +2262,6 @@
               </a:rPr>
               <a:t>日内不再修改</a:t>
             </a:r>
-            <a:endParaRPr/>
           </a:p>
         </p:txBody>
       </p:sp>
@@ -2361,7 +2325,6 @@
               </a:rPr>
               <a:t>三状态误差模型</a:t>
             </a:r>
-            <a:endParaRPr/>
           </a:p>
           <a:p>
             <a:pPr algn="ctr">
@@ -2377,29 +2340,8 @@
                 <a:latin typeface="Microsoft YaHei"/>
                 <a:ea typeface="Microsoft YaHei"/>
               </a:rPr>
-              <a:t>按</a:t>
-            </a:r>
-            <a:r>
-              <a:rPr lang="en-US" sz="1650">
-                <a:solidFill>
-                  <a:srgbClr val="111111"/>
-                </a:solidFill>
-                <a:latin typeface="Microsoft YaHei"/>
-                <a:ea typeface="Microsoft YaHei"/>
-              </a:rPr>
-              <a:t> ±0.84 </a:t>
-            </a:r>
-            <a:r>
-              <a:rPr lang="zh-CN" sz="1650">
-                <a:solidFill>
-                  <a:srgbClr val="111111"/>
-                </a:solidFill>
-                <a:latin typeface="Microsoft YaHei"/>
-                <a:ea typeface="Microsoft YaHei"/>
-              </a:rPr>
-              <a:t>分三态</a:t>
-            </a:r>
-            <a:endParaRPr/>
+              <a:t>按上下阈值划分类别</a:t>
+            </a:r>
           </a:p>
         </p:txBody>
       </p:sp>
@@ -2461,8 +2403,15 @@
                 <a:latin typeface="Microsoft YaHei"/>
                 <a:ea typeface="Microsoft YaHei"/>
               </a:rPr>
-              <a:t>Markov </a:t>
-            </a:r>
+              <a:t>估计状态转移</a:t>
+            </a:r>
+          </a:p>
+          <a:p>
+            <a:pPr algn="ctr">
+              <a:lnSpc>
+                <a:spcPct val="130000"/>
+              </a:lnSpc>
+            </a:pPr>
             <a:r>
               <a:rPr lang="zh-CN" sz="1650">
                 <a:solidFill>
@@ -2471,47 +2420,8 @@
                 <a:latin typeface="Microsoft YaHei"/>
                 <a:ea typeface="Microsoft YaHei"/>
               </a:rPr>
-              <a:t>转移估计</a:t>
-            </a:r>
-            <a:endParaRPr/>
-          </a:p>
-          <a:p>
-            <a:pPr algn="ctr">
-              <a:lnSpc>
-                <a:spcPct val="130000"/>
-              </a:lnSpc>
-            </a:pPr>
-            <a:r>
-              <a:rPr lang="zh-CN" sz="1650">
-                <a:solidFill>
-                  <a:srgbClr val="111111"/>
-                </a:solidFill>
-                <a:latin typeface="Microsoft YaHei"/>
-                <a:ea typeface="Microsoft YaHei"/>
-              </a:rPr>
-              <a:t>全局平滑</a:t>
-            </a:r>
-            <a:r>
-              <a:rPr lang="en-US" sz="1650">
-                <a:solidFill>
-                  <a:srgbClr val="111111"/>
-                </a:solidFill>
-                <a:latin typeface="Microsoft YaHei"/>
-                <a:ea typeface="Microsoft YaHei"/>
-              </a:rPr>
-              <a:t> + </a:t>
-            </a:r>
-            <a:r>
-              <a:rPr lang="zh-CN" sz="1650">
-                <a:solidFill>
-                  <a:srgbClr val="111111"/>
-                </a:solidFill>
-                <a:latin typeface="Microsoft YaHei"/>
-                <a:ea typeface="Microsoft YaHei"/>
-              </a:rPr>
-              <a:t>局部修正</a:t>
-            </a:r>
-            <a:endParaRPr/>
+              <a:t>全局平滑与局部修正</a:t>
+            </a:r>
           </a:p>
         </p:txBody>
       </p:sp>
@@ -2675,8 +2585,15 @@
                 <a:latin typeface="Microsoft YaHei"/>
                 <a:ea typeface="Microsoft YaHei"/>
               </a:rPr>
-              <a:t>终端参数</a:t>
-            </a:r>
+              <a:t>终端价值参数验证</a:t>
+            </a:r>
+          </a:p>
+          <a:p>
+            <a:pPr algn="ctr">
+              <a:lnSpc>
+                <a:spcPct val="130000"/>
+              </a:lnSpc>
+            </a:pPr>
             <a:r>
               <a:rPr lang="en-US" sz="1650">
                 <a:solidFill>
@@ -2685,67 +2602,8 @@
                 <a:latin typeface="Microsoft YaHei"/>
                 <a:ea typeface="Microsoft YaHei"/>
               </a:rPr>
-              <a:t> κ </a:t>
-            </a:r>
-            <a:r>
-              <a:rPr lang="zh-CN" sz="1650">
-                <a:solidFill>
-                  <a:srgbClr val="111111"/>
-                </a:solidFill>
-                <a:latin typeface="Microsoft YaHei"/>
-                <a:ea typeface="Microsoft YaHei"/>
-              </a:rPr>
-              <a:t>验证</a:t>
-            </a:r>
-            <a:endParaRPr/>
-          </a:p>
-          <a:p>
-            <a:pPr algn="ctr">
-              <a:lnSpc>
-                <a:spcPct val="130000"/>
-              </a:lnSpc>
-            </a:pPr>
-            <a:r>
-              <a:rPr lang="en-US" sz="1650">
-                <a:solidFill>
-                  <a:srgbClr val="111111"/>
-                </a:solidFill>
-                <a:latin typeface="Microsoft YaHei"/>
-                <a:ea typeface="Microsoft YaHei"/>
-              </a:rPr>
-              <a:t>1 </a:t>
-            </a:r>
-            <a:r>
-              <a:rPr lang="zh-CN" sz="1650">
-                <a:solidFill>
-                  <a:srgbClr val="111111"/>
-                </a:solidFill>
-                <a:latin typeface="Microsoft YaHei"/>
-                <a:ea typeface="Microsoft YaHei"/>
-              </a:rPr>
-              <a:t>月</a:t>
-            </a:r>
-            <a:r>
-              <a:rPr lang="en-US" sz="1650">
-                <a:solidFill>
-                  <a:srgbClr val="111111"/>
-                </a:solidFill>
-                <a:latin typeface="Microsoft YaHei"/>
-                <a:ea typeface="Microsoft YaHei"/>
-              </a:rPr>
-              <a:t> 22—31 </a:t>
-            </a:r>
-            <a:r>
-              <a:rPr lang="zh-CN" sz="1650">
-                <a:solidFill>
-                  <a:srgbClr val="111111"/>
-                </a:solidFill>
-                <a:latin typeface="Microsoft YaHei"/>
-                <a:ea typeface="Microsoft YaHei"/>
-              </a:rPr>
-              <a:t>日择定</a:t>
-            </a:r>
-            <a:endParaRPr/>
+              <a:t>依据一月验证期择定</a:t>
+            </a:r>
           </a:p>
         </p:txBody>
       </p:sp>
@@ -2929,7 +2787,6 @@
               </a:rPr>
               <a:t>日内反馈执行</a:t>
             </a:r>
-            <a:endParaRPr/>
           </a:p>
           <a:p>
             <a:pPr algn="ctr">
@@ -2945,18 +2802,15 @@
                 <a:latin typeface="Microsoft YaHei"/>
                 <a:ea typeface="Microsoft YaHei"/>
               </a:rPr>
-              <a:t>每</a:t>
-            </a:r>
-            <a:r>
-              <a:rPr lang="en-US" sz="1500">
-                <a:solidFill>
-                  <a:srgbClr val="111111"/>
-                </a:solidFill>
-                <a:latin typeface="Microsoft YaHei"/>
-                <a:ea typeface="Microsoft YaHei"/>
-              </a:rPr>
-              <a:t> 10 </a:t>
-            </a:r>
+              <a:t>每十分钟读取实测</a:t>
+            </a:r>
+          </a:p>
+          <a:p>
+            <a:pPr algn="ctr">
+              <a:lnSpc>
+                <a:spcPct val="130000"/>
+              </a:lnSpc>
+            </a:pPr>
             <a:r>
               <a:rPr lang="zh-CN" sz="1500">
                 <a:solidFill>
@@ -2965,9 +2819,8 @@
                 <a:latin typeface="Microsoft YaHei"/>
                 <a:ea typeface="Microsoft YaHei"/>
               </a:rPr>
-              <a:t>分钟读实测</a:t>
-            </a:r>
-            <a:endParaRPr/>
+              <a:t>富余时优先充电</a:t>
+            </a:r>
           </a:p>
           <a:p>
             <a:pPr algn="ctr">
@@ -2983,47 +2836,8 @@
                 <a:latin typeface="Microsoft YaHei"/>
                 <a:ea typeface="Microsoft YaHei"/>
               </a:rPr>
-              <a:t>富余：优先充电</a:t>
-            </a:r>
-            <a:endParaRPr/>
-          </a:p>
-          <a:p>
-            <a:pPr algn="ctr">
-              <a:lnSpc>
-                <a:spcPct val="130000"/>
-              </a:lnSpc>
-            </a:pPr>
-            <a:r>
-              <a:rPr lang="zh-CN" sz="1500">
-                <a:solidFill>
-                  <a:srgbClr val="111111"/>
-                </a:solidFill>
-                <a:latin typeface="Microsoft YaHei"/>
-                <a:ea typeface="Microsoft YaHei"/>
-              </a:rPr>
-              <a:t>缺口：放电</a:t>
-            </a:r>
-            <a:r>
-              <a:rPr lang="en-US" sz="1500">
-                <a:solidFill>
-                  <a:srgbClr val="111111"/>
-                </a:solidFill>
-                <a:latin typeface="Microsoft YaHei"/>
-                <a:ea typeface="Microsoft YaHei"/>
-              </a:rPr>
-              <a:t> + </a:t>
-            </a:r>
-            <a:r>
-              <a:rPr lang="zh-CN" sz="1500">
-                <a:solidFill>
-                  <a:srgbClr val="111111"/>
-                </a:solidFill>
-                <a:latin typeface="Microsoft YaHei"/>
-                <a:ea typeface="Microsoft YaHei"/>
-              </a:rPr>
-              <a:t>应急</a:t>
-            </a:r>
-            <a:endParaRPr/>
+              <a:t>缺口时放电并紧急购电</a:t>
+            </a:r>
           </a:p>
         </p:txBody>
       </p:sp>
@@ -3087,7 +2901,6 @@
               </a:rPr>
               <a:t>更新储电量</a:t>
             </a:r>
-            <a:endParaRPr/>
           </a:p>
           <a:p>
             <a:pPr algn="ctr">
@@ -3103,9 +2916,8 @@
                 <a:latin typeface="Microsoft YaHei"/>
                 <a:ea typeface="Microsoft YaHei"/>
               </a:rPr>
-              <a:t>E' = E + 0.9c - b/0.9</a:t>
-            </a:r>
-            <a:endParaRPr/>
+              <a:t>计入充放电损耗</a:t>
+            </a:r>
           </a:p>
           <a:p>
             <a:pPr algn="ctr">
@@ -3121,29 +2933,8 @@
                 <a:latin typeface="Microsoft YaHei"/>
                 <a:ea typeface="Microsoft YaHei"/>
               </a:rPr>
-              <a:t>日末库存</a:t>
-            </a:r>
-            <a:r>
-              <a:rPr lang="en-US" sz="1350">
-                <a:solidFill>
-                  <a:srgbClr val="111111"/>
-                </a:solidFill>
-                <a:latin typeface="Microsoft YaHei"/>
-                <a:ea typeface="Microsoft YaHei"/>
-              </a:rPr>
-              <a:t> = </a:t>
-            </a:r>
-            <a:r>
-              <a:rPr lang="zh-CN" sz="1350">
-                <a:solidFill>
-                  <a:srgbClr val="111111"/>
-                </a:solidFill>
-                <a:latin typeface="Microsoft YaHei"/>
-                <a:ea typeface="Microsoft YaHei"/>
-              </a:rPr>
-              <a:t>次日日初</a:t>
-            </a:r>
-            <a:endParaRPr/>
+              <a:t>日末库存传递至次日</a:t>
+            </a:r>
           </a:p>
         </p:txBody>
       </p:sp>
@@ -3207,7 +2998,6 @@
               </a:rPr>
               <a:t>逐日费用核算</a:t>
             </a:r>
-            <a:endParaRPr/>
           </a:p>
           <a:p>
             <a:pPr algn="ctr">
@@ -3223,19 +3013,8 @@
                 <a:latin typeface="Microsoft YaHei"/>
                 <a:ea typeface="Microsoft YaHei"/>
               </a:rPr>
-              <a:t>普通购电</a:t>
-            </a:r>
-            <a:r>
-              <a:rPr lang="en-US" sz="1500">
-                <a:solidFill>
-                  <a:srgbClr val="111111"/>
-                </a:solidFill>
-                <a:latin typeface="Microsoft YaHei"/>
-                <a:ea typeface="Microsoft YaHei"/>
-              </a:rPr>
-              <a:t> p·g</a:t>
-            </a:r>
-            <a:endParaRPr/>
+              <a:t>普通购电按分时电价</a:t>
+            </a:r>
           </a:p>
           <a:p>
             <a:pPr algn="ctr">
@@ -3251,19 +3030,8 @@
                 <a:latin typeface="Microsoft YaHei"/>
                 <a:ea typeface="Microsoft YaHei"/>
               </a:rPr>
-              <a:t>应急购电</a:t>
-            </a:r>
-            <a:r>
-              <a:rPr lang="en-US" sz="1500">
-                <a:solidFill>
-                  <a:srgbClr val="111111"/>
-                </a:solidFill>
-                <a:latin typeface="Microsoft YaHei"/>
-                <a:ea typeface="Microsoft YaHei"/>
-              </a:rPr>
-              <a:t> 5p·e</a:t>
-            </a:r>
-            <a:endParaRPr/>
+              <a:t>紧急购电按五倍电价</a:t>
+            </a:r>
           </a:p>
         </p:txBody>
       </p:sp>
